--- a/Teaching/Chemistry/Labs/FCC Chem 3A Expt 6a Molecular Modeling.pptx
+++ b/Teaching/Chemistry/Labs/FCC Chem 3A Expt 6a Molecular Modeling.pptx
@@ -5,7 +5,7 @@
     <p:sldMasterId id="2147483803" r:id="rId1"/>
   </p:sldMasterIdLst>
   <p:notesMasterIdLst>
-    <p:notesMasterId r:id="rId11"/>
+    <p:notesMasterId r:id="rId19"/>
   </p:notesMasterIdLst>
   <p:sldIdLst>
     <p:sldId id="608" r:id="rId2"/>
@@ -17,6 +17,14 @@
     <p:sldId id="882" r:id="rId8"/>
     <p:sldId id="883" r:id="rId9"/>
     <p:sldId id="612" r:id="rId10"/>
+    <p:sldId id="884" r:id="rId11"/>
+    <p:sldId id="885" r:id="rId12"/>
+    <p:sldId id="886" r:id="rId13"/>
+    <p:sldId id="891" r:id="rId14"/>
+    <p:sldId id="887" r:id="rId15"/>
+    <p:sldId id="888" r:id="rId16"/>
+    <p:sldId id="889" r:id="rId17"/>
+    <p:sldId id="890" r:id="rId18"/>
   </p:sldIdLst>
   <p:sldSz cx="9144000" cy="6858000" type="screen4x3"/>
   <p:notesSz cx="7315200" cy="9601200"/>
@@ -10553,6 +10561,814 @@
         </p:txBody>
       </p:sp>
     </p:spTree>
+  </p:cSld>
+  <p:clrMapOvr>
+    <a:masterClrMapping/>
+  </p:clrMapOvr>
+</p:sld>
+</file>
+
+<file path=ppt/slides/slide10.xml><?xml version="1.0" encoding="utf-8"?>
+<p:sld xmlns:a="http://schemas.openxmlformats.org/drawingml/2006/main" xmlns:r="http://schemas.openxmlformats.org/officeDocument/2006/relationships" xmlns:p="http://schemas.openxmlformats.org/presentationml/2006/main">
+  <p:cSld>
+    <p:spTree>
+      <p:nvGrpSpPr>
+        <p:cNvPr id="1" name="">
+          <a:extLst>
+            <a:ext uri="{FF2B5EF4-FFF2-40B4-BE49-F238E27FC236}">
+              <a16:creationId xmlns:a16="http://schemas.microsoft.com/office/drawing/2014/main" id="{2DAF82DB-0CB8-8B3F-17D8-79BDAD0BD799}"/>
+            </a:ext>
+          </a:extLst>
+        </p:cNvPr>
+        <p:cNvGrpSpPr/>
+        <p:nvPr/>
+      </p:nvGrpSpPr>
+      <p:grpSpPr>
+        <a:xfrm>
+          <a:off x="0" y="0"/>
+          <a:ext cx="0" cy="0"/>
+          <a:chOff x="0" y="0"/>
+          <a:chExt cx="0" cy="0"/>
+        </a:xfrm>
+      </p:grpSpPr>
+      <p:sp>
+        <p:nvSpPr>
+          <p:cNvPr id="4" name="Slide Number Placeholder 3">
+            <a:extLst>
+              <a:ext uri="{FF2B5EF4-FFF2-40B4-BE49-F238E27FC236}">
+                <a16:creationId xmlns:a16="http://schemas.microsoft.com/office/drawing/2014/main" id="{7FB5BC04-7981-FD75-DE7C-78BE86426C31}"/>
+              </a:ext>
+            </a:extLst>
+          </p:cNvPr>
+          <p:cNvSpPr>
+            <a:spLocks noGrp="1"/>
+          </p:cNvSpPr>
+          <p:nvPr>
+            <p:ph type="sldNum" sz="quarter" idx="4294967295"/>
+          </p:nvPr>
+        </p:nvSpPr>
+        <p:spPr>
+          <a:xfrm>
+            <a:off x="7086600" y="6364288"/>
+            <a:ext cx="2057400" cy="365125"/>
+          </a:xfrm>
+        </p:spPr>
+        <p:txBody>
+          <a:bodyPr/>
+          <a:lstStyle/>
+          <a:p>
+            <a:fld id="{061D2053-A9F4-4414-A3FB-98959FE1F87A}" type="slidenum">
+              <a:rPr lang="en-US" smtClean="0"/>
+              <a:pPr/>
+              <a:t>10</a:t>
+            </a:fld>
+            <a:endParaRPr lang="en-US" dirty="0"/>
+          </a:p>
+        </p:txBody>
+      </p:sp>
+      <p:pic>
+        <p:nvPicPr>
+          <p:cNvPr id="12" name="Picture 11">
+            <a:extLst>
+              <a:ext uri="{FF2B5EF4-FFF2-40B4-BE49-F238E27FC236}">
+                <a16:creationId xmlns:a16="http://schemas.microsoft.com/office/drawing/2014/main" id="{392D0970-FE0C-FEDB-C84C-A21184EE7AA5}"/>
+              </a:ext>
+            </a:extLst>
+          </p:cNvPr>
+          <p:cNvPicPr>
+            <a:picLocks noChangeAspect="1"/>
+          </p:cNvPicPr>
+          <p:nvPr/>
+        </p:nvPicPr>
+        <p:blipFill>
+          <a:blip r:embed="rId2"/>
+          <a:stretch>
+            <a:fillRect/>
+          </a:stretch>
+        </p:blipFill>
+        <p:spPr>
+          <a:xfrm>
+            <a:off x="1175853" y="0"/>
+            <a:ext cx="6792294" cy="6858000"/>
+          </a:xfrm>
+          <a:prstGeom prst="rect">
+            <a:avLst/>
+          </a:prstGeom>
+        </p:spPr>
+      </p:pic>
+    </p:spTree>
+    <p:extLst>
+      <p:ext uri="{BB962C8B-B14F-4D97-AF65-F5344CB8AC3E}">
+        <p14:creationId xmlns:p14="http://schemas.microsoft.com/office/powerpoint/2010/main" val="1247040041"/>
+      </p:ext>
+    </p:extLst>
+  </p:cSld>
+  <p:clrMapOvr>
+    <a:masterClrMapping/>
+  </p:clrMapOvr>
+</p:sld>
+</file>
+
+<file path=ppt/slides/slide11.xml><?xml version="1.0" encoding="utf-8"?>
+<p:sld xmlns:a="http://schemas.openxmlformats.org/drawingml/2006/main" xmlns:r="http://schemas.openxmlformats.org/officeDocument/2006/relationships" xmlns:p="http://schemas.openxmlformats.org/presentationml/2006/main">
+  <p:cSld>
+    <p:spTree>
+      <p:nvGrpSpPr>
+        <p:cNvPr id="1" name="">
+          <a:extLst>
+            <a:ext uri="{FF2B5EF4-FFF2-40B4-BE49-F238E27FC236}">
+              <a16:creationId xmlns:a16="http://schemas.microsoft.com/office/drawing/2014/main" id="{07F2B9DD-CCA3-A059-ACAF-C6DE3855049E}"/>
+            </a:ext>
+          </a:extLst>
+        </p:cNvPr>
+        <p:cNvGrpSpPr/>
+        <p:nvPr/>
+      </p:nvGrpSpPr>
+      <p:grpSpPr>
+        <a:xfrm>
+          <a:off x="0" y="0"/>
+          <a:ext cx="0" cy="0"/>
+          <a:chOff x="0" y="0"/>
+          <a:chExt cx="0" cy="0"/>
+        </a:xfrm>
+      </p:grpSpPr>
+      <p:sp>
+        <p:nvSpPr>
+          <p:cNvPr id="4" name="Slide Number Placeholder 3">
+            <a:extLst>
+              <a:ext uri="{FF2B5EF4-FFF2-40B4-BE49-F238E27FC236}">
+                <a16:creationId xmlns:a16="http://schemas.microsoft.com/office/drawing/2014/main" id="{DD0C0275-78FB-8843-43A0-827E8CFD927B}"/>
+              </a:ext>
+            </a:extLst>
+          </p:cNvPr>
+          <p:cNvSpPr>
+            <a:spLocks noGrp="1"/>
+          </p:cNvSpPr>
+          <p:nvPr>
+            <p:ph type="sldNum" sz="quarter" idx="4294967295"/>
+          </p:nvPr>
+        </p:nvSpPr>
+        <p:spPr>
+          <a:xfrm>
+            <a:off x="7086600" y="6364288"/>
+            <a:ext cx="2057400" cy="365125"/>
+          </a:xfrm>
+        </p:spPr>
+        <p:txBody>
+          <a:bodyPr/>
+          <a:lstStyle/>
+          <a:p>
+            <a:fld id="{061D2053-A9F4-4414-A3FB-98959FE1F87A}" type="slidenum">
+              <a:rPr lang="en-US" smtClean="0"/>
+              <a:pPr/>
+              <a:t>11</a:t>
+            </a:fld>
+            <a:endParaRPr lang="en-US" dirty="0"/>
+          </a:p>
+        </p:txBody>
+      </p:sp>
+      <p:pic>
+        <p:nvPicPr>
+          <p:cNvPr id="3" name="Picture 2">
+            <a:extLst>
+              <a:ext uri="{FF2B5EF4-FFF2-40B4-BE49-F238E27FC236}">
+                <a16:creationId xmlns:a16="http://schemas.microsoft.com/office/drawing/2014/main" id="{EC5ED4D9-E560-ED90-C619-088AB04AC99A}"/>
+              </a:ext>
+            </a:extLst>
+          </p:cNvPr>
+          <p:cNvPicPr>
+            <a:picLocks noChangeAspect="1"/>
+          </p:cNvPicPr>
+          <p:nvPr/>
+        </p:nvPicPr>
+        <p:blipFill>
+          <a:blip r:embed="rId2"/>
+          <a:stretch>
+            <a:fillRect/>
+          </a:stretch>
+        </p:blipFill>
+        <p:spPr>
+          <a:xfrm>
+            <a:off x="1241252" y="0"/>
+            <a:ext cx="6661496" cy="6858000"/>
+          </a:xfrm>
+          <a:prstGeom prst="rect">
+            <a:avLst/>
+          </a:prstGeom>
+        </p:spPr>
+      </p:pic>
+    </p:spTree>
+    <p:extLst>
+      <p:ext uri="{BB962C8B-B14F-4D97-AF65-F5344CB8AC3E}">
+        <p14:creationId xmlns:p14="http://schemas.microsoft.com/office/powerpoint/2010/main" val="3007646019"/>
+      </p:ext>
+    </p:extLst>
+  </p:cSld>
+  <p:clrMapOvr>
+    <a:masterClrMapping/>
+  </p:clrMapOvr>
+</p:sld>
+</file>
+
+<file path=ppt/slides/slide12.xml><?xml version="1.0" encoding="utf-8"?>
+<p:sld xmlns:a="http://schemas.openxmlformats.org/drawingml/2006/main" xmlns:r="http://schemas.openxmlformats.org/officeDocument/2006/relationships" xmlns:p="http://schemas.openxmlformats.org/presentationml/2006/main">
+  <p:cSld>
+    <p:spTree>
+      <p:nvGrpSpPr>
+        <p:cNvPr id="1" name="">
+          <a:extLst>
+            <a:ext uri="{FF2B5EF4-FFF2-40B4-BE49-F238E27FC236}">
+              <a16:creationId xmlns:a16="http://schemas.microsoft.com/office/drawing/2014/main" id="{E93E4218-1ECC-6A6E-EA1B-8F1B5E445C79}"/>
+            </a:ext>
+          </a:extLst>
+        </p:cNvPr>
+        <p:cNvGrpSpPr/>
+        <p:nvPr/>
+      </p:nvGrpSpPr>
+      <p:grpSpPr>
+        <a:xfrm>
+          <a:off x="0" y="0"/>
+          <a:ext cx="0" cy="0"/>
+          <a:chOff x="0" y="0"/>
+          <a:chExt cx="0" cy="0"/>
+        </a:xfrm>
+      </p:grpSpPr>
+      <p:sp>
+        <p:nvSpPr>
+          <p:cNvPr id="4" name="Slide Number Placeholder 3">
+            <a:extLst>
+              <a:ext uri="{FF2B5EF4-FFF2-40B4-BE49-F238E27FC236}">
+                <a16:creationId xmlns:a16="http://schemas.microsoft.com/office/drawing/2014/main" id="{91C085D1-F915-BD53-15BE-636DEF9406A7}"/>
+              </a:ext>
+            </a:extLst>
+          </p:cNvPr>
+          <p:cNvSpPr>
+            <a:spLocks noGrp="1"/>
+          </p:cNvSpPr>
+          <p:nvPr>
+            <p:ph type="sldNum" sz="quarter" idx="4294967295"/>
+          </p:nvPr>
+        </p:nvSpPr>
+        <p:spPr>
+          <a:xfrm>
+            <a:off x="7086600" y="6364288"/>
+            <a:ext cx="2057400" cy="365125"/>
+          </a:xfrm>
+        </p:spPr>
+        <p:txBody>
+          <a:bodyPr/>
+          <a:lstStyle/>
+          <a:p>
+            <a:fld id="{061D2053-A9F4-4414-A3FB-98959FE1F87A}" type="slidenum">
+              <a:rPr lang="en-US" smtClean="0"/>
+              <a:pPr/>
+              <a:t>12</a:t>
+            </a:fld>
+            <a:endParaRPr lang="en-US" dirty="0"/>
+          </a:p>
+        </p:txBody>
+      </p:sp>
+      <p:pic>
+        <p:nvPicPr>
+          <p:cNvPr id="7" name="Picture 6">
+            <a:extLst>
+              <a:ext uri="{FF2B5EF4-FFF2-40B4-BE49-F238E27FC236}">
+                <a16:creationId xmlns:a16="http://schemas.microsoft.com/office/drawing/2014/main" id="{73B1EA3B-1CB9-F651-F9CA-C65BB0DB2AC8}"/>
+              </a:ext>
+            </a:extLst>
+          </p:cNvPr>
+          <p:cNvPicPr>
+            <a:picLocks noChangeAspect="1"/>
+          </p:cNvPicPr>
+          <p:nvPr/>
+        </p:nvPicPr>
+        <p:blipFill>
+          <a:blip r:embed="rId2"/>
+          <a:stretch>
+            <a:fillRect/>
+          </a:stretch>
+        </p:blipFill>
+        <p:spPr>
+          <a:xfrm>
+            <a:off x="1478643" y="0"/>
+            <a:ext cx="6186714" cy="6858000"/>
+          </a:xfrm>
+          <a:prstGeom prst="rect">
+            <a:avLst/>
+          </a:prstGeom>
+        </p:spPr>
+      </p:pic>
+    </p:spTree>
+    <p:extLst>
+      <p:ext uri="{BB962C8B-B14F-4D97-AF65-F5344CB8AC3E}">
+        <p14:creationId xmlns:p14="http://schemas.microsoft.com/office/powerpoint/2010/main" val="1439837138"/>
+      </p:ext>
+    </p:extLst>
+  </p:cSld>
+  <p:clrMapOvr>
+    <a:masterClrMapping/>
+  </p:clrMapOvr>
+</p:sld>
+</file>
+
+<file path=ppt/slides/slide13.xml><?xml version="1.0" encoding="utf-8"?>
+<p:sld xmlns:a="http://schemas.openxmlformats.org/drawingml/2006/main" xmlns:r="http://schemas.openxmlformats.org/officeDocument/2006/relationships" xmlns:p="http://schemas.openxmlformats.org/presentationml/2006/main">
+  <p:cSld>
+    <p:spTree>
+      <p:nvGrpSpPr>
+        <p:cNvPr id="1" name="">
+          <a:extLst>
+            <a:ext uri="{FF2B5EF4-FFF2-40B4-BE49-F238E27FC236}">
+              <a16:creationId xmlns:a16="http://schemas.microsoft.com/office/drawing/2014/main" id="{9D2A084C-4FFD-0423-98CD-B240751629DF}"/>
+            </a:ext>
+          </a:extLst>
+        </p:cNvPr>
+        <p:cNvGrpSpPr/>
+        <p:nvPr/>
+      </p:nvGrpSpPr>
+      <p:grpSpPr>
+        <a:xfrm>
+          <a:off x="0" y="0"/>
+          <a:ext cx="0" cy="0"/>
+          <a:chOff x="0" y="0"/>
+          <a:chExt cx="0" cy="0"/>
+        </a:xfrm>
+      </p:grpSpPr>
+      <p:sp>
+        <p:nvSpPr>
+          <p:cNvPr id="4" name="Slide Number Placeholder 3">
+            <a:extLst>
+              <a:ext uri="{FF2B5EF4-FFF2-40B4-BE49-F238E27FC236}">
+                <a16:creationId xmlns:a16="http://schemas.microsoft.com/office/drawing/2014/main" id="{49B2529F-6201-8FC7-D6FA-0CDF1E97EE80}"/>
+              </a:ext>
+            </a:extLst>
+          </p:cNvPr>
+          <p:cNvSpPr>
+            <a:spLocks noGrp="1"/>
+          </p:cNvSpPr>
+          <p:nvPr>
+            <p:ph type="sldNum" sz="quarter" idx="4294967295"/>
+          </p:nvPr>
+        </p:nvSpPr>
+        <p:spPr>
+          <a:xfrm>
+            <a:off x="7086600" y="6364288"/>
+            <a:ext cx="2057400" cy="365125"/>
+          </a:xfrm>
+        </p:spPr>
+        <p:txBody>
+          <a:bodyPr/>
+          <a:lstStyle/>
+          <a:p>
+            <a:fld id="{061D2053-A9F4-4414-A3FB-98959FE1F87A}" type="slidenum">
+              <a:rPr lang="en-US" smtClean="0"/>
+              <a:pPr/>
+              <a:t>13</a:t>
+            </a:fld>
+            <a:endParaRPr lang="en-US" dirty="0"/>
+          </a:p>
+        </p:txBody>
+      </p:sp>
+      <p:pic>
+        <p:nvPicPr>
+          <p:cNvPr id="3" name="Picture 2">
+            <a:extLst>
+              <a:ext uri="{FF2B5EF4-FFF2-40B4-BE49-F238E27FC236}">
+                <a16:creationId xmlns:a16="http://schemas.microsoft.com/office/drawing/2014/main" id="{A8484B51-79C1-E72E-02B8-A8D734DFCAFD}"/>
+              </a:ext>
+            </a:extLst>
+          </p:cNvPr>
+          <p:cNvPicPr>
+            <a:picLocks noChangeAspect="1"/>
+          </p:cNvPicPr>
+          <p:nvPr/>
+        </p:nvPicPr>
+        <p:blipFill>
+          <a:blip r:embed="rId2"/>
+          <a:stretch>
+            <a:fillRect/>
+          </a:stretch>
+        </p:blipFill>
+        <p:spPr>
+          <a:xfrm>
+            <a:off x="0" y="123223"/>
+            <a:ext cx="9144000" cy="6611554"/>
+          </a:xfrm>
+          <a:prstGeom prst="rect">
+            <a:avLst/>
+          </a:prstGeom>
+        </p:spPr>
+      </p:pic>
+    </p:spTree>
+    <p:extLst>
+      <p:ext uri="{BB962C8B-B14F-4D97-AF65-F5344CB8AC3E}">
+        <p14:creationId xmlns:p14="http://schemas.microsoft.com/office/powerpoint/2010/main" val="2546920224"/>
+      </p:ext>
+    </p:extLst>
+  </p:cSld>
+  <p:clrMapOvr>
+    <a:masterClrMapping/>
+  </p:clrMapOvr>
+</p:sld>
+</file>
+
+<file path=ppt/slides/slide14.xml><?xml version="1.0" encoding="utf-8"?>
+<p:sld xmlns:a="http://schemas.openxmlformats.org/drawingml/2006/main" xmlns:r="http://schemas.openxmlformats.org/officeDocument/2006/relationships" xmlns:p="http://schemas.openxmlformats.org/presentationml/2006/main">
+  <p:cSld>
+    <p:spTree>
+      <p:nvGrpSpPr>
+        <p:cNvPr id="1" name="">
+          <a:extLst>
+            <a:ext uri="{FF2B5EF4-FFF2-40B4-BE49-F238E27FC236}">
+              <a16:creationId xmlns:a16="http://schemas.microsoft.com/office/drawing/2014/main" id="{83DE2176-2689-774D-5201-7C1A9B40B2D2}"/>
+            </a:ext>
+          </a:extLst>
+        </p:cNvPr>
+        <p:cNvGrpSpPr/>
+        <p:nvPr/>
+      </p:nvGrpSpPr>
+      <p:grpSpPr>
+        <a:xfrm>
+          <a:off x="0" y="0"/>
+          <a:ext cx="0" cy="0"/>
+          <a:chOff x="0" y="0"/>
+          <a:chExt cx="0" cy="0"/>
+        </a:xfrm>
+      </p:grpSpPr>
+      <p:sp>
+        <p:nvSpPr>
+          <p:cNvPr id="4" name="Slide Number Placeholder 3">
+            <a:extLst>
+              <a:ext uri="{FF2B5EF4-FFF2-40B4-BE49-F238E27FC236}">
+                <a16:creationId xmlns:a16="http://schemas.microsoft.com/office/drawing/2014/main" id="{ADAF3295-789F-D71C-58C2-61AB7AD0DC29}"/>
+              </a:ext>
+            </a:extLst>
+          </p:cNvPr>
+          <p:cNvSpPr>
+            <a:spLocks noGrp="1"/>
+          </p:cNvSpPr>
+          <p:nvPr>
+            <p:ph type="sldNum" sz="quarter" idx="4294967295"/>
+          </p:nvPr>
+        </p:nvSpPr>
+        <p:spPr>
+          <a:xfrm>
+            <a:off x="7086600" y="6364288"/>
+            <a:ext cx="2057400" cy="365125"/>
+          </a:xfrm>
+        </p:spPr>
+        <p:txBody>
+          <a:bodyPr/>
+          <a:lstStyle/>
+          <a:p>
+            <a:fld id="{061D2053-A9F4-4414-A3FB-98959FE1F87A}" type="slidenum">
+              <a:rPr lang="en-US" smtClean="0"/>
+              <a:pPr/>
+              <a:t>14</a:t>
+            </a:fld>
+            <a:endParaRPr lang="en-US" dirty="0"/>
+          </a:p>
+        </p:txBody>
+      </p:sp>
+      <p:pic>
+        <p:nvPicPr>
+          <p:cNvPr id="6" name="Picture 5">
+            <a:extLst>
+              <a:ext uri="{FF2B5EF4-FFF2-40B4-BE49-F238E27FC236}">
+                <a16:creationId xmlns:a16="http://schemas.microsoft.com/office/drawing/2014/main" id="{ADC9E0FA-6EA8-A975-9039-F3CDADE0E2AD}"/>
+              </a:ext>
+            </a:extLst>
+          </p:cNvPr>
+          <p:cNvPicPr>
+            <a:picLocks noChangeAspect="1"/>
+          </p:cNvPicPr>
+          <p:nvPr/>
+        </p:nvPicPr>
+        <p:blipFill>
+          <a:blip r:embed="rId2"/>
+          <a:stretch>
+            <a:fillRect/>
+          </a:stretch>
+        </p:blipFill>
+        <p:spPr>
+          <a:xfrm>
+            <a:off x="1647825" y="0"/>
+            <a:ext cx="5848350" cy="6858000"/>
+          </a:xfrm>
+          <a:prstGeom prst="rect">
+            <a:avLst/>
+          </a:prstGeom>
+        </p:spPr>
+      </p:pic>
+    </p:spTree>
+    <p:extLst>
+      <p:ext uri="{BB962C8B-B14F-4D97-AF65-F5344CB8AC3E}">
+        <p14:creationId xmlns:p14="http://schemas.microsoft.com/office/powerpoint/2010/main" val="1081919599"/>
+      </p:ext>
+    </p:extLst>
+  </p:cSld>
+  <p:clrMapOvr>
+    <a:masterClrMapping/>
+  </p:clrMapOvr>
+</p:sld>
+</file>
+
+<file path=ppt/slides/slide15.xml><?xml version="1.0" encoding="utf-8"?>
+<p:sld xmlns:a="http://schemas.openxmlformats.org/drawingml/2006/main" xmlns:r="http://schemas.openxmlformats.org/officeDocument/2006/relationships" xmlns:p="http://schemas.openxmlformats.org/presentationml/2006/main">
+  <p:cSld>
+    <p:spTree>
+      <p:nvGrpSpPr>
+        <p:cNvPr id="1" name="">
+          <a:extLst>
+            <a:ext uri="{FF2B5EF4-FFF2-40B4-BE49-F238E27FC236}">
+              <a16:creationId xmlns:a16="http://schemas.microsoft.com/office/drawing/2014/main" id="{62005E68-416C-54E5-B8E2-0FD81DE22460}"/>
+            </a:ext>
+          </a:extLst>
+        </p:cNvPr>
+        <p:cNvGrpSpPr/>
+        <p:nvPr/>
+      </p:nvGrpSpPr>
+      <p:grpSpPr>
+        <a:xfrm>
+          <a:off x="0" y="0"/>
+          <a:ext cx="0" cy="0"/>
+          <a:chOff x="0" y="0"/>
+          <a:chExt cx="0" cy="0"/>
+        </a:xfrm>
+      </p:grpSpPr>
+      <p:sp>
+        <p:nvSpPr>
+          <p:cNvPr id="4" name="Slide Number Placeholder 3">
+            <a:extLst>
+              <a:ext uri="{FF2B5EF4-FFF2-40B4-BE49-F238E27FC236}">
+                <a16:creationId xmlns:a16="http://schemas.microsoft.com/office/drawing/2014/main" id="{516B3FF7-81B7-140B-8C5D-4DF579750D0D}"/>
+              </a:ext>
+            </a:extLst>
+          </p:cNvPr>
+          <p:cNvSpPr>
+            <a:spLocks noGrp="1"/>
+          </p:cNvSpPr>
+          <p:nvPr>
+            <p:ph type="sldNum" sz="quarter" idx="4294967295"/>
+          </p:nvPr>
+        </p:nvSpPr>
+        <p:spPr>
+          <a:xfrm>
+            <a:off x="7086600" y="6364288"/>
+            <a:ext cx="2057400" cy="365125"/>
+          </a:xfrm>
+        </p:spPr>
+        <p:txBody>
+          <a:bodyPr/>
+          <a:lstStyle/>
+          <a:p>
+            <a:fld id="{061D2053-A9F4-4414-A3FB-98959FE1F87A}" type="slidenum">
+              <a:rPr lang="en-US" smtClean="0"/>
+              <a:pPr/>
+              <a:t>15</a:t>
+            </a:fld>
+            <a:endParaRPr lang="en-US" dirty="0"/>
+          </a:p>
+        </p:txBody>
+      </p:sp>
+      <p:pic>
+        <p:nvPicPr>
+          <p:cNvPr id="9" name="Picture 8">
+            <a:extLst>
+              <a:ext uri="{FF2B5EF4-FFF2-40B4-BE49-F238E27FC236}">
+                <a16:creationId xmlns:a16="http://schemas.microsoft.com/office/drawing/2014/main" id="{3552B203-43A1-DCFC-6204-B7F73DFE6D9F}"/>
+              </a:ext>
+            </a:extLst>
+          </p:cNvPr>
+          <p:cNvPicPr>
+            <a:picLocks noChangeAspect="1"/>
+          </p:cNvPicPr>
+          <p:nvPr/>
+        </p:nvPicPr>
+        <p:blipFill>
+          <a:blip r:embed="rId2"/>
+          <a:stretch>
+            <a:fillRect/>
+          </a:stretch>
+        </p:blipFill>
+        <p:spPr>
+          <a:xfrm>
+            <a:off x="1777694" y="0"/>
+            <a:ext cx="5588611" cy="6858000"/>
+          </a:xfrm>
+          <a:prstGeom prst="rect">
+            <a:avLst/>
+          </a:prstGeom>
+        </p:spPr>
+      </p:pic>
+    </p:spTree>
+    <p:extLst>
+      <p:ext uri="{BB962C8B-B14F-4D97-AF65-F5344CB8AC3E}">
+        <p14:creationId xmlns:p14="http://schemas.microsoft.com/office/powerpoint/2010/main" val="231739612"/>
+      </p:ext>
+    </p:extLst>
+  </p:cSld>
+  <p:clrMapOvr>
+    <a:masterClrMapping/>
+  </p:clrMapOvr>
+</p:sld>
+</file>
+
+<file path=ppt/slides/slide16.xml><?xml version="1.0" encoding="utf-8"?>
+<p:sld xmlns:a="http://schemas.openxmlformats.org/drawingml/2006/main" xmlns:r="http://schemas.openxmlformats.org/officeDocument/2006/relationships" xmlns:p="http://schemas.openxmlformats.org/presentationml/2006/main">
+  <p:cSld>
+    <p:spTree>
+      <p:nvGrpSpPr>
+        <p:cNvPr id="1" name="">
+          <a:extLst>
+            <a:ext uri="{FF2B5EF4-FFF2-40B4-BE49-F238E27FC236}">
+              <a16:creationId xmlns:a16="http://schemas.microsoft.com/office/drawing/2014/main" id="{2DB856C9-58D9-40D4-D4A9-93FC85BC3952}"/>
+            </a:ext>
+          </a:extLst>
+        </p:cNvPr>
+        <p:cNvGrpSpPr/>
+        <p:nvPr/>
+      </p:nvGrpSpPr>
+      <p:grpSpPr>
+        <a:xfrm>
+          <a:off x="0" y="0"/>
+          <a:ext cx="0" cy="0"/>
+          <a:chOff x="0" y="0"/>
+          <a:chExt cx="0" cy="0"/>
+        </a:xfrm>
+      </p:grpSpPr>
+      <p:sp>
+        <p:nvSpPr>
+          <p:cNvPr id="4" name="Slide Number Placeholder 3">
+            <a:extLst>
+              <a:ext uri="{FF2B5EF4-FFF2-40B4-BE49-F238E27FC236}">
+                <a16:creationId xmlns:a16="http://schemas.microsoft.com/office/drawing/2014/main" id="{4A14E4C6-3D31-A920-43F1-2761B605A2B9}"/>
+              </a:ext>
+            </a:extLst>
+          </p:cNvPr>
+          <p:cNvSpPr>
+            <a:spLocks noGrp="1"/>
+          </p:cNvSpPr>
+          <p:nvPr>
+            <p:ph type="sldNum" sz="quarter" idx="4294967295"/>
+          </p:nvPr>
+        </p:nvSpPr>
+        <p:spPr>
+          <a:xfrm>
+            <a:off x="7086600" y="6364288"/>
+            <a:ext cx="2057400" cy="365125"/>
+          </a:xfrm>
+        </p:spPr>
+        <p:txBody>
+          <a:bodyPr/>
+          <a:lstStyle/>
+          <a:p>
+            <a:fld id="{061D2053-A9F4-4414-A3FB-98959FE1F87A}" type="slidenum">
+              <a:rPr lang="en-US" smtClean="0"/>
+              <a:pPr/>
+              <a:t>16</a:t>
+            </a:fld>
+            <a:endParaRPr lang="en-US" dirty="0"/>
+          </a:p>
+        </p:txBody>
+      </p:sp>
+      <p:pic>
+        <p:nvPicPr>
+          <p:cNvPr id="8" name="Picture 7">
+            <a:extLst>
+              <a:ext uri="{FF2B5EF4-FFF2-40B4-BE49-F238E27FC236}">
+                <a16:creationId xmlns:a16="http://schemas.microsoft.com/office/drawing/2014/main" id="{9609EBB4-4662-9623-BB2C-80A2849F0631}"/>
+              </a:ext>
+            </a:extLst>
+          </p:cNvPr>
+          <p:cNvPicPr>
+            <a:picLocks noChangeAspect="1"/>
+          </p:cNvPicPr>
+          <p:nvPr/>
+        </p:nvPicPr>
+        <p:blipFill>
+          <a:blip r:embed="rId2"/>
+          <a:stretch>
+            <a:fillRect/>
+          </a:stretch>
+        </p:blipFill>
+        <p:spPr>
+          <a:xfrm>
+            <a:off x="304341" y="0"/>
+            <a:ext cx="8535318" cy="6858000"/>
+          </a:xfrm>
+          <a:prstGeom prst="rect">
+            <a:avLst/>
+          </a:prstGeom>
+        </p:spPr>
+      </p:pic>
+    </p:spTree>
+    <p:extLst>
+      <p:ext uri="{BB962C8B-B14F-4D97-AF65-F5344CB8AC3E}">
+        <p14:creationId xmlns:p14="http://schemas.microsoft.com/office/powerpoint/2010/main" val="3076108425"/>
+      </p:ext>
+    </p:extLst>
+  </p:cSld>
+  <p:clrMapOvr>
+    <a:masterClrMapping/>
+  </p:clrMapOvr>
+</p:sld>
+</file>
+
+<file path=ppt/slides/slide17.xml><?xml version="1.0" encoding="utf-8"?>
+<p:sld xmlns:a="http://schemas.openxmlformats.org/drawingml/2006/main" xmlns:r="http://schemas.openxmlformats.org/officeDocument/2006/relationships" xmlns:p="http://schemas.openxmlformats.org/presentationml/2006/main">
+  <p:cSld>
+    <p:spTree>
+      <p:nvGrpSpPr>
+        <p:cNvPr id="1" name="">
+          <a:extLst>
+            <a:ext uri="{FF2B5EF4-FFF2-40B4-BE49-F238E27FC236}">
+              <a16:creationId xmlns:a16="http://schemas.microsoft.com/office/drawing/2014/main" id="{D008CC41-8D55-A842-F423-756E85BC3D6C}"/>
+            </a:ext>
+          </a:extLst>
+        </p:cNvPr>
+        <p:cNvGrpSpPr/>
+        <p:nvPr/>
+      </p:nvGrpSpPr>
+      <p:grpSpPr>
+        <a:xfrm>
+          <a:off x="0" y="0"/>
+          <a:ext cx="0" cy="0"/>
+          <a:chOff x="0" y="0"/>
+          <a:chExt cx="0" cy="0"/>
+        </a:xfrm>
+      </p:grpSpPr>
+      <p:sp>
+        <p:nvSpPr>
+          <p:cNvPr id="4" name="Slide Number Placeholder 3">
+            <a:extLst>
+              <a:ext uri="{FF2B5EF4-FFF2-40B4-BE49-F238E27FC236}">
+                <a16:creationId xmlns:a16="http://schemas.microsoft.com/office/drawing/2014/main" id="{88E78B3B-FD69-0DB9-837C-DE449D949124}"/>
+              </a:ext>
+            </a:extLst>
+          </p:cNvPr>
+          <p:cNvSpPr>
+            <a:spLocks noGrp="1"/>
+          </p:cNvSpPr>
+          <p:nvPr>
+            <p:ph type="sldNum" sz="quarter" idx="4294967295"/>
+          </p:nvPr>
+        </p:nvSpPr>
+        <p:spPr>
+          <a:xfrm>
+            <a:off x="7086600" y="6364288"/>
+            <a:ext cx="2057400" cy="365125"/>
+          </a:xfrm>
+        </p:spPr>
+        <p:txBody>
+          <a:bodyPr/>
+          <a:lstStyle/>
+          <a:p>
+            <a:fld id="{061D2053-A9F4-4414-A3FB-98959FE1F87A}" type="slidenum">
+              <a:rPr lang="en-US" smtClean="0"/>
+              <a:pPr/>
+              <a:t>17</a:t>
+            </a:fld>
+            <a:endParaRPr lang="en-US" dirty="0"/>
+          </a:p>
+        </p:txBody>
+      </p:sp>
+      <p:pic>
+        <p:nvPicPr>
+          <p:cNvPr id="3" name="Picture 2">
+            <a:extLst>
+              <a:ext uri="{FF2B5EF4-FFF2-40B4-BE49-F238E27FC236}">
+                <a16:creationId xmlns:a16="http://schemas.microsoft.com/office/drawing/2014/main" id="{0F300819-D892-9348-13D7-53B1EF237F19}"/>
+              </a:ext>
+            </a:extLst>
+          </p:cNvPr>
+          <p:cNvPicPr>
+            <a:picLocks noChangeAspect="1"/>
+          </p:cNvPicPr>
+          <p:nvPr/>
+        </p:nvPicPr>
+        <p:blipFill>
+          <a:blip r:embed="rId2"/>
+          <a:stretch>
+            <a:fillRect/>
+          </a:stretch>
+        </p:blipFill>
+        <p:spPr>
+          <a:xfrm>
+            <a:off x="1735595" y="0"/>
+            <a:ext cx="5672809" cy="6858000"/>
+          </a:xfrm>
+          <a:prstGeom prst="rect">
+            <a:avLst/>
+          </a:prstGeom>
+        </p:spPr>
+      </p:pic>
+    </p:spTree>
+    <p:extLst>
+      <p:ext uri="{BB962C8B-B14F-4D97-AF65-F5344CB8AC3E}">
+        <p14:creationId xmlns:p14="http://schemas.microsoft.com/office/powerpoint/2010/main" val="1621651027"/>
+      </p:ext>
+    </p:extLst>
   </p:cSld>
   <p:clrMapOvr>
     <a:masterClrMapping/>

--- a/Teaching/Chemistry/Labs/FCC Chem 3A Expt 6a Molecular Modeling.pptx
+++ b/Teaching/Chemistry/Labs/FCC Chem 3A Expt 6a Molecular Modeling.pptx
@@ -11234,10 +11234,10 @@
       </p:sp>
       <p:pic>
         <p:nvPicPr>
-          <p:cNvPr id="8" name="Picture 7">
+          <p:cNvPr id="3" name="Picture 2">
             <a:extLst>
               <a:ext uri="{FF2B5EF4-FFF2-40B4-BE49-F238E27FC236}">
-                <a16:creationId xmlns:a16="http://schemas.microsoft.com/office/drawing/2014/main" id="{9609EBB4-4662-9623-BB2C-80A2849F0631}"/>
+                <a16:creationId xmlns:a16="http://schemas.microsoft.com/office/drawing/2014/main" id="{C6CF1FE8-F5AB-9EBA-62AE-A135B99B2F5D}"/>
               </a:ext>
             </a:extLst>
           </p:cNvPr>
@@ -11254,8 +11254,8 @@
         </p:blipFill>
         <p:spPr>
           <a:xfrm>
-            <a:off x="304341" y="0"/>
-            <a:ext cx="8535318" cy="6858000"/>
+            <a:off x="304800" y="0"/>
+            <a:ext cx="8534400" cy="6858000"/>
           </a:xfrm>
           <a:prstGeom prst="rect">
             <a:avLst/>
